--- a/assets/pptx/catalog-508.pptx
+++ b/assets/pptx/catalog-508.pptx
@@ -3269,7 +3269,7 @@
                 <a:ea typeface="Ebrima"/>
                 <a:cs typeface="Ebrima"/>
               </a:rPr>
-              <a:t>ዝማሬ የሚገባው እግዚአብሔር አምላኬ ነው (2x)</a:t>
+              <a:t>ዝማሬ የሚገባው እግዚአብሔር አምላኬ ነው 2x</a:t>
             </a:r>
           </a:p>
         </p:txBody>
@@ -3457,7 +3457,7 @@
                 <a:ea typeface="Ebrima"/>
                 <a:cs typeface="Ebrima"/>
               </a:rPr>
-              <a:t>እግዚአብሔር አምላኬ ነው (4x)</a:t>
+              <a:t>እግዚአብሔር አምላኬ ነው 4x</a:t>
             </a:r>
           </a:p>
         </p:txBody>
@@ -3645,7 +3645,7 @@
                 <a:ea typeface="Ebrima"/>
                 <a:cs typeface="Ebrima"/>
               </a:rPr>
-              <a:t>አዝ ደህና ደህና ነኝ እግዚአብሔር ይመስገን (5x)</a:t>
+              <a:t>አዝ ደህና ደህና ነኝ እግዚአብሔር ይመስገን 5x</a:t>
             </a:r>
           </a:p>
           <a:p>
@@ -3663,7 +3663,7 @@
                 <a:ea typeface="Ebrima"/>
                 <a:cs typeface="Ebrima"/>
               </a:rPr>
-              <a:t>ደህና ደህና ነኝ እግዚአብሔር ይመስገን (5x)</a:t>
+              <a:t>ደህና ደህና ነኝ እግዚአብሔር ይመስገን 5x</a:t>
             </a:r>
           </a:p>
         </p:txBody>
@@ -3748,7 +3748,7 @@
                 <a:ea typeface="Ebrima"/>
                 <a:cs typeface="Ebrima"/>
               </a:rPr>
-              <a:t>ደራሲው እርሱ ነው ተራኪዋ እኔ ነኝ (2x)</a:t>
+              <a:t>ደራሲው እርሱ ነው ተራኪዋ እኔ ነኝ 2x</a:t>
             </a:r>
           </a:p>
           <a:p>
@@ -3784,7 +3784,7 @@
                 <a:ea typeface="Ebrima"/>
                 <a:cs typeface="Ebrima"/>
               </a:rPr>
-              <a:t>ደህና ነሽ በሎኛል ደህና ነኝ እላለው (2x)</a:t>
+              <a:t>ደህና ነሽ በሎኛል ደህና ነኝ እላለው 2x</a:t>
             </a:r>
           </a:p>
         </p:txBody>
@@ -3851,7 +3851,7 @@
                 <a:ea typeface="Ebrima"/>
                 <a:cs typeface="Ebrima"/>
               </a:rPr>
-              <a:t>አዝ ደህና ደህና ነኝ እግዚአብሔር ይመስገን (5x)</a:t>
+              <a:t>አዝ ደህና ደህና ነኝ እግዚአብሔር ይመስገን 5x</a:t>
             </a:r>
           </a:p>
           <a:p>
@@ -3869,7 +3869,7 @@
                 <a:ea typeface="Ebrima"/>
                 <a:cs typeface="Ebrima"/>
               </a:rPr>
-              <a:t>ደህና ደህና ነኝ እግዚአብሔር ይመስገን (5x)</a:t>
+              <a:t>ደህና ደህና ነኝ እግዚአብሔር ይመስገን 5x</a:t>
             </a:r>
           </a:p>
         </p:txBody>
@@ -3954,7 +3954,7 @@
                 <a:ea typeface="Ebrima"/>
                 <a:cs typeface="Ebrima"/>
               </a:rPr>
-              <a:t>በቀኝም በግራም ሠላም አይደል ወይ (2x)</a:t>
+              <a:t>በቀኝም በግራም ሠላም አይደል ወይ 2x</a:t>
             </a:r>
           </a:p>
           <a:p>
@@ -3990,7 +3990,7 @@
                 <a:ea typeface="Ebrima"/>
                 <a:cs typeface="Ebrima"/>
               </a:rPr>
-              <a:t>በአገሪቱ ላይ ተዘልያለሁ (2x)</a:t>
+              <a:t>በአገሪቱ ላይ ተዘልያለሁ 2x</a:t>
             </a:r>
           </a:p>
         </p:txBody>
@@ -4057,7 +4057,7 @@
                 <a:ea typeface="Ebrima"/>
                 <a:cs typeface="Ebrima"/>
               </a:rPr>
-              <a:t>አዝ ደህና ደህና ነኝ እግዚአብሔር ይመስገን (5x)</a:t>
+              <a:t>አዝ ደህና ደህና ነኝ እግዚአብሔር ይመስገን 5x</a:t>
             </a:r>
           </a:p>
           <a:p>
@@ -4075,7 +4075,7 @@
                 <a:ea typeface="Ebrima"/>
                 <a:cs typeface="Ebrima"/>
               </a:rPr>
-              <a:t>ደህና ደህና ነኝ እግዚአብሔር ይመስገን (5x)</a:t>
+              <a:t>ደህና ደህና ነኝ እግዚአብሔር ይመስገን 5x</a:t>
             </a:r>
           </a:p>
         </p:txBody>
@@ -4263,7 +4263,7 @@
                 <a:ea typeface="Ebrima"/>
                 <a:cs typeface="Ebrima"/>
               </a:rPr>
-              <a:t>አዝ ደህና ደህና ነኝ እግዚአብሔር ይመስገን (5x)</a:t>
+              <a:t>አዝ ደህና ደህና ነኝ እግዚአብሔር ይመስገን 5x</a:t>
             </a:r>
           </a:p>
           <a:p>
@@ -4281,7 +4281,7 @@
                 <a:ea typeface="Ebrima"/>
                 <a:cs typeface="Ebrima"/>
               </a:rPr>
-              <a:t>ደህና ደህና ነኝ እግዚአብሔር ይመስገን (5x)</a:t>
+              <a:t>ደህና ደህና ነኝ እግዚአብሔር ይመስገን 5x</a:t>
             </a:r>
           </a:p>
         </p:txBody>
